--- a/art/launcher_icon.pptx
+++ b/art/launcher_icon.pptx
@@ -6,6 +6,7 @@
   </p:sldMasterIdLst>
   <p:sldIdLst>
     <p:sldId id="256" r:id="rId7"/>
+    <p:sldId id="257" r:id="rId8"/>
   </p:sldIdLst>
   <p:sldSz cx="4876800" cy="4876800" type="screen4x3"/>
   <p:notesSz cx="6858000" cy="9144000"/>
@@ -3879,6 +3880,797 @@
             <a:xfrm>
               <a:off x="2143506" y="2995422"/>
               <a:ext cx="589788" cy="0"/>
+            </a:xfrm>
+            <a:prstGeom prst="line">
+              <a:avLst/>
+            </a:prstGeom>
+            <a:ln w="114300" cap="rnd">
+              <a:solidFill>
+                <a:srgbClr val="1A2233"/>
+              </a:solidFill>
+            </a:ln>
+          </p:spPr>
+          <p:style>
+            <a:lnRef idx="2">
+              <a:schemeClr val="accent1"/>
+            </a:lnRef>
+            <a:fillRef idx="0">
+              <a:schemeClr val="accent1"/>
+            </a:fillRef>
+            <a:effectRef idx="1">
+              <a:schemeClr val="accent1"/>
+            </a:effectRef>
+            <a:fontRef idx="minor">
+              <a:schemeClr val="tx1"/>
+            </a:fontRef>
+          </p:style>
+        </p:cxnSp>
+      </p:grpSp>
+    </p:spTree>
+  </p:cSld>
+  <p:clrMapOvr>
+    <a:masterClrMapping/>
+  </p:clrMapOvr>
+</p:sld>
+</file>
+
+<file path=ppt/slides/slide2.xml><?xml version="1.0" encoding="utf-8"?>
+<p:sld xmlns:a="http://schemas.openxmlformats.org/drawingml/2006/main" xmlns:p="http://schemas.openxmlformats.org/presentationml/2006/main" xmlns:r="http://schemas.openxmlformats.org/officeDocument/2006/relationships">
+  <p:cSld>
+    <p:spTree>
+      <p:nvGrpSpPr>
+        <p:cNvPr id="1" name=""/>
+        <p:cNvGrpSpPr/>
+        <p:nvPr/>
+      </p:nvGrpSpPr>
+      <p:grpSpPr/>
+      <p:grpSp>
+        <p:nvGrpSpPr>
+          <p:cNvPr id="2" name="launcher icon 001"/>
+          <p:cNvGrpSpPr/>
+          <p:nvPr/>
+        </p:nvGrpSpPr>
+        <p:grpSpPr>
+          <a:xfrm>
+            <a:off x="0" y="0"/>
+            <a:ext cx="4876800" cy="4876800"/>
+            <a:chOff x="0" y="0"/>
+            <a:chExt cx="4876800" cy="4876800"/>
+          </a:xfrm>
+        </p:grpSpPr>
+        <p:sp>
+          <p:nvSpPr>
+            <p:cNvPr id="3" name="Frame"/>
+            <p:cNvSpPr/>
+            <p:nvPr/>
+          </p:nvSpPr>
+          <p:spPr>
+            <a:xfrm>
+              <a:off x="0" y="0"/>
+              <a:ext cx="4876800" cy="4876800"/>
+            </a:xfrm>
+            <a:prstGeom prst="rect">
+              <a:avLst/>
+            </a:prstGeom>
+            <a:noFill/>
+            <a:ln>
+              <a:noFill/>
+            </a:ln>
+            <a:effectLst/>
+          </p:spPr>
+          <p:style>
+            <a:lnRef idx="1">
+              <a:schemeClr val="accent1"/>
+            </a:lnRef>
+            <a:fillRef idx="3">
+              <a:schemeClr val="accent1"/>
+            </a:fillRef>
+            <a:effectRef idx="2">
+              <a:schemeClr val="accent1"/>
+            </a:effectRef>
+            <a:fontRef idx="minor">
+              <a:schemeClr val="lt1"/>
+            </a:fontRef>
+          </p:style>
+          <p:txBody>
+            <a:bodyPr rtlCol="0" anchor="ctr"/>
+            <a:lstStyle/>
+            <a:p>
+              <a:pPr algn="ctr"/>
+            </a:p>
+          </p:txBody>
+        </p:sp>
+        <p:sp>
+          <p:nvSpPr>
+            <p:cNvPr id="4" name="Oval 3"/>
+            <p:cNvSpPr/>
+            <p:nvPr/>
+          </p:nvSpPr>
+          <p:spPr>
+            <a:xfrm>
+              <a:off x="1638300" y="3393186"/>
+              <a:ext cx="1600200" cy="224028"/>
+            </a:xfrm>
+            <a:prstGeom prst="ellipse">
+              <a:avLst/>
+            </a:prstGeom>
+            <a:solidFill>
+              <a:srgbClr val="000000">
+                <a:alpha val="16000"/>
+              </a:srgbClr>
+            </a:solidFill>
+            <a:ln>
+              <a:noFill/>
+            </a:ln>
+            <a:effectLst/>
+          </p:spPr>
+          <p:style>
+            <a:lnRef idx="1">
+              <a:schemeClr val="accent1"/>
+            </a:lnRef>
+            <a:fillRef idx="3">
+              <a:schemeClr val="accent1"/>
+            </a:fillRef>
+            <a:effectRef idx="2">
+              <a:schemeClr val="accent1"/>
+            </a:effectRef>
+            <a:fontRef idx="minor">
+              <a:schemeClr val="lt1"/>
+            </a:fontRef>
+          </p:style>
+          <p:txBody>
+            <a:bodyPr rtlCol="0" anchor="ctr"/>
+            <a:lstStyle/>
+            <a:p>
+              <a:pPr algn="ctr"/>
+            </a:p>
+          </p:txBody>
+        </p:sp>
+        <p:sp>
+          <p:nvSpPr>
+            <p:cNvPr id="5" name="Rounded Rectangle 4"/>
+            <p:cNvSpPr/>
+            <p:nvPr/>
+          </p:nvSpPr>
+          <p:spPr>
+            <a:xfrm>
+              <a:off x="2065020" y="3137154"/>
+              <a:ext cx="256032" cy="330708"/>
+            </a:xfrm>
+            <a:prstGeom prst="roundRect">
+              <a:avLst>
+                <a:gd name="adj" fmla="val 40000"/>
+              </a:avLst>
+            </a:prstGeom>
+            <a:solidFill>
+              <a:srgbClr val="095C5B"/>
+            </a:solidFill>
+            <a:ln w="85534">
+              <a:solidFill>
+                <a:srgbClr val="095C5B"/>
+              </a:solidFill>
+            </a:ln>
+            <a:effectLst/>
+          </p:spPr>
+          <p:style>
+            <a:lnRef idx="1">
+              <a:schemeClr val="accent1"/>
+            </a:lnRef>
+            <a:fillRef idx="3">
+              <a:schemeClr val="accent1"/>
+            </a:fillRef>
+            <a:effectRef idx="2">
+              <a:schemeClr val="accent1"/>
+            </a:effectRef>
+            <a:fontRef idx="minor">
+              <a:schemeClr val="lt1"/>
+            </a:fontRef>
+          </p:style>
+          <p:txBody>
+            <a:bodyPr rtlCol="0" anchor="ctr"/>
+            <a:lstStyle/>
+            <a:p>
+              <a:pPr algn="ctr"/>
+            </a:p>
+          </p:txBody>
+        </p:sp>
+        <p:sp>
+          <p:nvSpPr>
+            <p:cNvPr id="6" name="Rounded Rectangle 5"/>
+            <p:cNvSpPr/>
+            <p:nvPr/>
+          </p:nvSpPr>
+          <p:spPr>
+            <a:xfrm>
+              <a:off x="2555748" y="3137154"/>
+              <a:ext cx="256032" cy="330708"/>
+            </a:xfrm>
+            <a:prstGeom prst="roundRect">
+              <a:avLst>
+                <a:gd name="adj" fmla="val 40000"/>
+              </a:avLst>
+            </a:prstGeom>
+            <a:solidFill>
+              <a:srgbClr val="095C5B"/>
+            </a:solidFill>
+            <a:ln w="85534">
+              <a:solidFill>
+                <a:srgbClr val="095C5B"/>
+              </a:solidFill>
+            </a:ln>
+            <a:effectLst/>
+          </p:spPr>
+          <p:style>
+            <a:lnRef idx="1">
+              <a:schemeClr val="accent1"/>
+            </a:lnRef>
+            <a:fillRef idx="3">
+              <a:schemeClr val="accent1"/>
+            </a:fillRef>
+            <a:effectRef idx="2">
+              <a:schemeClr val="accent1"/>
+            </a:effectRef>
+            <a:fontRef idx="minor">
+              <a:schemeClr val="lt1"/>
+            </a:fontRef>
+          </p:style>
+          <p:txBody>
+            <a:bodyPr rtlCol="0" anchor="ctr"/>
+            <a:lstStyle/>
+            <a:p>
+              <a:pPr algn="ctr"/>
+            </a:p>
+          </p:txBody>
+        </p:sp>
+        <p:sp>
+          <p:nvSpPr>
+            <p:cNvPr id="7" name="Oval 6"/>
+            <p:cNvSpPr/>
+            <p:nvPr/>
+          </p:nvSpPr>
+          <p:spPr>
+            <a:xfrm rot="720000">
+              <a:off x="1622298" y="2395728"/>
+              <a:ext cx="245364" cy="512064"/>
+            </a:xfrm>
+            <a:prstGeom prst="ellipse">
+              <a:avLst/>
+            </a:prstGeom>
+            <a:solidFill>
+              <a:srgbClr val="0E7C7B"/>
+            </a:solidFill>
+            <a:ln w="85534">
+              <a:solidFill>
+                <a:srgbClr val="095C5B"/>
+              </a:solidFill>
+            </a:ln>
+            <a:effectLst/>
+          </p:spPr>
+          <p:style>
+            <a:lnRef idx="1">
+              <a:schemeClr val="accent1"/>
+            </a:lnRef>
+            <a:fillRef idx="3">
+              <a:schemeClr val="accent1"/>
+            </a:fillRef>
+            <a:effectRef idx="2">
+              <a:schemeClr val="accent1"/>
+            </a:effectRef>
+            <a:fontRef idx="minor">
+              <a:schemeClr val="lt1"/>
+            </a:fontRef>
+          </p:style>
+          <p:txBody>
+            <a:bodyPr rtlCol="0" anchor="ctr"/>
+            <a:lstStyle/>
+            <a:p>
+              <a:pPr algn="ctr"/>
+            </a:p>
+          </p:txBody>
+        </p:sp>
+        <p:sp>
+          <p:nvSpPr>
+            <p:cNvPr id="8" name="Oval 7"/>
+            <p:cNvSpPr/>
+            <p:nvPr/>
+          </p:nvSpPr>
+          <p:spPr>
+            <a:xfrm rot="20880000">
+              <a:off x="3009138" y="2395728"/>
+              <a:ext cx="245364" cy="512064"/>
+            </a:xfrm>
+            <a:prstGeom prst="ellipse">
+              <a:avLst/>
+            </a:prstGeom>
+            <a:solidFill>
+              <a:srgbClr val="0E7C7B"/>
+            </a:solidFill>
+            <a:ln w="85534">
+              <a:solidFill>
+                <a:srgbClr val="095C5B"/>
+              </a:solidFill>
+            </a:ln>
+            <a:effectLst/>
+          </p:spPr>
+          <p:style>
+            <a:lnRef idx="1">
+              <a:schemeClr val="accent1"/>
+            </a:lnRef>
+            <a:fillRef idx="3">
+              <a:schemeClr val="accent1"/>
+            </a:fillRef>
+            <a:effectRef idx="2">
+              <a:schemeClr val="accent1"/>
+            </a:effectRef>
+            <a:fontRef idx="minor">
+              <a:schemeClr val="lt1"/>
+            </a:fontRef>
+          </p:style>
+          <p:txBody>
+            <a:bodyPr rtlCol="0" anchor="ctr"/>
+            <a:lstStyle/>
+            <a:p>
+              <a:pPr algn="ctr"/>
+            </a:p>
+          </p:txBody>
+        </p:sp>
+        <p:cxnSp>
+          <p:nvCxnSpPr>
+            <p:cNvPr id="9" name="Connector 8"/>
+            <p:cNvCxnSpPr/>
+            <p:nvPr/>
+          </p:nvCxnSpPr>
+          <p:spPr>
+            <a:xfrm flipV="1">
+              <a:off x="2438400" y="1627632"/>
+              <a:ext cx="0" cy="352044"/>
+            </a:xfrm>
+            <a:prstGeom prst="line">
+              <a:avLst/>
+            </a:prstGeom>
+            <a:ln w="114300" cap="rnd">
+              <a:solidFill>
+                <a:srgbClr val="095C5B"/>
+              </a:solidFill>
+            </a:ln>
+          </p:spPr>
+          <p:style>
+            <a:lnRef idx="2">
+              <a:schemeClr val="accent1"/>
+            </a:lnRef>
+            <a:fillRef idx="0">
+              <a:schemeClr val="accent1"/>
+            </a:fillRef>
+            <a:effectRef idx="1">
+              <a:schemeClr val="accent1"/>
+            </a:effectRef>
+            <a:fontRef idx="minor">
+              <a:schemeClr val="tx1"/>
+            </a:fontRef>
+          </p:style>
+        </p:cxnSp>
+        <p:sp>
+          <p:nvSpPr>
+            <p:cNvPr id="10" name="Oval 9"/>
+            <p:cNvSpPr/>
+            <p:nvPr/>
+          </p:nvSpPr>
+          <p:spPr>
+            <a:xfrm>
+              <a:off x="2315718" y="1408938"/>
+              <a:ext cx="245364" cy="245364"/>
+            </a:xfrm>
+            <a:prstGeom prst="ellipse">
+              <a:avLst/>
+            </a:prstGeom>
+            <a:solidFill>
+              <a:srgbClr val="0E7C7B"/>
+            </a:solidFill>
+            <a:ln w="85534">
+              <a:solidFill>
+                <a:srgbClr val="095C5B"/>
+              </a:solidFill>
+            </a:ln>
+            <a:effectLst/>
+          </p:spPr>
+          <p:style>
+            <a:lnRef idx="1">
+              <a:schemeClr val="accent1"/>
+            </a:lnRef>
+            <a:fillRef idx="3">
+              <a:schemeClr val="accent1"/>
+            </a:fillRef>
+            <a:effectRef idx="2">
+              <a:schemeClr val="accent1"/>
+            </a:effectRef>
+            <a:fontRef idx="minor">
+              <a:schemeClr val="lt1"/>
+            </a:fontRef>
+          </p:style>
+          <p:txBody>
+            <a:bodyPr rtlCol="0" anchor="ctr"/>
+            <a:lstStyle/>
+            <a:p>
+              <a:pPr algn="ctr"/>
+            </a:p>
+          </p:txBody>
+        </p:sp>
+        <p:sp>
+          <p:nvSpPr>
+            <p:cNvPr id="11" name="Rounded Rectangle 10"/>
+            <p:cNvSpPr/>
+            <p:nvPr/>
+          </p:nvSpPr>
+          <p:spPr>
+            <a:xfrm>
+              <a:off x="1771650" y="1926336"/>
+              <a:ext cx="1333500" cy="1258824"/>
+            </a:xfrm>
+            <a:prstGeom prst="roundRect">
+              <a:avLst>
+                <a:gd name="adj" fmla="val 32000"/>
+              </a:avLst>
+            </a:prstGeom>
+            <a:solidFill>
+              <a:srgbClr val="0E7C7B"/>
+            </a:solidFill>
+            <a:ln w="85534">
+              <a:solidFill>
+                <a:srgbClr val="095C5B"/>
+              </a:solidFill>
+            </a:ln>
+            <a:effectLst/>
+          </p:spPr>
+          <p:style>
+            <a:lnRef idx="1">
+              <a:schemeClr val="accent1"/>
+            </a:lnRef>
+            <a:fillRef idx="3">
+              <a:schemeClr val="accent1"/>
+            </a:fillRef>
+            <a:effectRef idx="2">
+              <a:schemeClr val="accent1"/>
+            </a:effectRef>
+            <a:fontRef idx="minor">
+              <a:schemeClr val="lt1"/>
+            </a:fontRef>
+          </p:style>
+          <p:txBody>
+            <a:bodyPr rtlCol="0" anchor="ctr"/>
+            <a:lstStyle/>
+            <a:p>
+              <a:pPr algn="ctr"/>
+            </a:p>
+          </p:txBody>
+        </p:sp>
+        <p:sp>
+          <p:nvSpPr>
+            <p:cNvPr id="12" name="Rounded Rectangle 11"/>
+            <p:cNvSpPr/>
+            <p:nvPr/>
+          </p:nvSpPr>
+          <p:spPr>
+            <a:xfrm>
+              <a:off x="1846326" y="2017014"/>
+              <a:ext cx="1184148" cy="394716"/>
+            </a:xfrm>
+            <a:prstGeom prst="roundRect">
+              <a:avLst>
+                <a:gd name="adj" fmla="val 45000"/>
+              </a:avLst>
+            </a:prstGeom>
+            <a:solidFill>
+              <a:srgbClr val="2A9493"/>
+            </a:solidFill>
+            <a:ln>
+              <a:noFill/>
+            </a:ln>
+            <a:effectLst/>
+          </p:spPr>
+          <p:style>
+            <a:lnRef idx="1">
+              <a:schemeClr val="accent1"/>
+            </a:lnRef>
+            <a:fillRef idx="3">
+              <a:schemeClr val="accent1"/>
+            </a:fillRef>
+            <a:effectRef idx="2">
+              <a:schemeClr val="accent1"/>
+            </a:effectRef>
+            <a:fontRef idx="minor">
+              <a:schemeClr val="lt1"/>
+            </a:fontRef>
+          </p:style>
+          <p:txBody>
+            <a:bodyPr rtlCol="0" anchor="ctr"/>
+            <a:lstStyle/>
+            <a:p>
+              <a:pPr algn="ctr"/>
+            </a:p>
+          </p:txBody>
+        </p:sp>
+        <p:sp>
+          <p:nvSpPr>
+            <p:cNvPr id="13" name="Rectangle 12"/>
+            <p:cNvSpPr/>
+            <p:nvPr/>
+          </p:nvSpPr>
+          <p:spPr>
+            <a:xfrm>
+              <a:off x="2347722" y="2918460"/>
+              <a:ext cx="181356" cy="106680"/>
+            </a:xfrm>
+            <a:prstGeom prst="rect">
+              <a:avLst/>
+            </a:prstGeom>
+            <a:solidFill>
+              <a:srgbClr val="D9534F"/>
+            </a:solidFill>
+            <a:ln w="51321">
+              <a:solidFill>
+                <a:srgbClr val="A33A37"/>
+              </a:solidFill>
+            </a:ln>
+            <a:effectLst/>
+          </p:spPr>
+          <p:style>
+            <a:lnRef idx="1">
+              <a:schemeClr val="accent1"/>
+            </a:lnRef>
+            <a:fillRef idx="3">
+              <a:schemeClr val="accent1"/>
+            </a:fillRef>
+            <a:effectRef idx="2">
+              <a:schemeClr val="accent1"/>
+            </a:effectRef>
+            <a:fontRef idx="minor">
+              <a:schemeClr val="lt1"/>
+            </a:fontRef>
+          </p:style>
+          <p:txBody>
+            <a:bodyPr rtlCol="0" anchor="ctr"/>
+            <a:lstStyle/>
+            <a:p>
+              <a:pPr algn="ctr"/>
+            </a:p>
+          </p:txBody>
+        </p:sp>
+        <p:sp>
+          <p:nvSpPr>
+            <p:cNvPr id="14" name="Isosceles Triangle 13"/>
+            <p:cNvSpPr/>
+            <p:nvPr/>
+          </p:nvSpPr>
+          <p:spPr>
+            <a:xfrm rot="10800000">
+              <a:off x="2315718" y="3019806"/>
+              <a:ext cx="245364" cy="266700"/>
+            </a:xfrm>
+            <a:prstGeom prst="triangle">
+              <a:avLst/>
+            </a:prstGeom>
+            <a:solidFill>
+              <a:srgbClr val="D9534F"/>
+            </a:solidFill>
+            <a:ln w="51321">
+              <a:solidFill>
+                <a:srgbClr val="A33A37"/>
+              </a:solidFill>
+            </a:ln>
+            <a:effectLst/>
+          </p:spPr>
+          <p:style>
+            <a:lnRef idx="1">
+              <a:schemeClr val="accent1"/>
+            </a:lnRef>
+            <a:fillRef idx="3">
+              <a:schemeClr val="accent1"/>
+            </a:fillRef>
+            <a:effectRef idx="2">
+              <a:schemeClr val="accent1"/>
+            </a:effectRef>
+            <a:fontRef idx="minor">
+              <a:schemeClr val="lt1"/>
+            </a:fontRef>
+          </p:style>
+          <p:txBody>
+            <a:bodyPr rtlCol="0" anchor="ctr"/>
+            <a:lstStyle/>
+            <a:p>
+              <a:pPr algn="ctr"/>
+            </a:p>
+          </p:txBody>
+        </p:sp>
+        <p:sp>
+          <p:nvSpPr>
+            <p:cNvPr id="15" name="Oval 14"/>
+            <p:cNvSpPr/>
+            <p:nvPr/>
+          </p:nvSpPr>
+          <p:spPr>
+            <a:xfrm>
+              <a:off x="1969008" y="2257044"/>
+              <a:ext cx="362712" cy="362712"/>
+            </a:xfrm>
+            <a:prstGeom prst="ellipse">
+              <a:avLst/>
+            </a:prstGeom>
+            <a:solidFill>
+              <a:srgbClr val="FFFFFF"/>
+            </a:solidFill>
+            <a:ln w="64151">
+              <a:solidFill>
+                <a:srgbClr val="1A2233"/>
+              </a:solidFill>
+            </a:ln>
+            <a:effectLst/>
+          </p:spPr>
+          <p:style>
+            <a:lnRef idx="1">
+              <a:schemeClr val="accent1"/>
+            </a:lnRef>
+            <a:fillRef idx="3">
+              <a:schemeClr val="accent1"/>
+            </a:fillRef>
+            <a:effectRef idx="2">
+              <a:schemeClr val="accent1"/>
+            </a:effectRef>
+            <a:fontRef idx="minor">
+              <a:schemeClr val="lt1"/>
+            </a:fontRef>
+          </p:style>
+          <p:txBody>
+            <a:bodyPr rtlCol="0" anchor="ctr"/>
+            <a:lstStyle/>
+            <a:p>
+              <a:pPr algn="ctr"/>
+            </a:p>
+          </p:txBody>
+        </p:sp>
+        <p:sp>
+          <p:nvSpPr>
+            <p:cNvPr id="16" name="Oval 15"/>
+            <p:cNvSpPr/>
+            <p:nvPr/>
+          </p:nvSpPr>
+          <p:spPr>
+            <a:xfrm>
+              <a:off x="2101398" y="2378553"/>
+              <a:ext cx="163220" cy="163220"/>
+            </a:xfrm>
+            <a:prstGeom prst="ellipse">
+              <a:avLst/>
+            </a:prstGeom>
+            <a:solidFill>
+              <a:srgbClr val="1A2233"/>
+            </a:solidFill>
+            <a:ln>
+              <a:noFill/>
+            </a:ln>
+            <a:effectLst/>
+          </p:spPr>
+          <p:style>
+            <a:lnRef idx="1">
+              <a:schemeClr val="accent1"/>
+            </a:lnRef>
+            <a:fillRef idx="3">
+              <a:schemeClr val="accent1"/>
+            </a:fillRef>
+            <a:effectRef idx="2">
+              <a:schemeClr val="accent1"/>
+            </a:effectRef>
+            <a:fontRef idx="minor">
+              <a:schemeClr val="lt1"/>
+            </a:fontRef>
+          </p:style>
+          <p:txBody>
+            <a:bodyPr rtlCol="0" anchor="ctr"/>
+            <a:lstStyle/>
+            <a:p>
+              <a:pPr algn="ctr"/>
+            </a:p>
+          </p:txBody>
+        </p:sp>
+        <p:sp>
+          <p:nvSpPr>
+            <p:cNvPr id="17" name="Oval 16"/>
+            <p:cNvSpPr/>
+            <p:nvPr/>
+          </p:nvSpPr>
+          <p:spPr>
+            <a:xfrm>
+              <a:off x="2545080" y="2257044"/>
+              <a:ext cx="362712" cy="362712"/>
+            </a:xfrm>
+            <a:prstGeom prst="ellipse">
+              <a:avLst/>
+            </a:prstGeom>
+            <a:solidFill>
+              <a:srgbClr val="FFFFFF"/>
+            </a:solidFill>
+            <a:ln w="64151">
+              <a:solidFill>
+                <a:srgbClr val="1A2233"/>
+              </a:solidFill>
+            </a:ln>
+            <a:effectLst/>
+          </p:spPr>
+          <p:style>
+            <a:lnRef idx="1">
+              <a:schemeClr val="accent1"/>
+            </a:lnRef>
+            <a:fillRef idx="3">
+              <a:schemeClr val="accent1"/>
+            </a:fillRef>
+            <a:effectRef idx="2">
+              <a:schemeClr val="accent1"/>
+            </a:effectRef>
+            <a:fontRef idx="minor">
+              <a:schemeClr val="lt1"/>
+            </a:fontRef>
+          </p:style>
+          <p:txBody>
+            <a:bodyPr rtlCol="0" anchor="ctr"/>
+            <a:lstStyle/>
+            <a:p>
+              <a:pPr algn="ctr"/>
+            </a:p>
+          </p:txBody>
+        </p:sp>
+        <p:sp>
+          <p:nvSpPr>
+            <p:cNvPr id="18" name="Oval 17"/>
+            <p:cNvSpPr/>
+            <p:nvPr/>
+          </p:nvSpPr>
+          <p:spPr>
+            <a:xfrm>
+              <a:off x="2677470" y="2378553"/>
+              <a:ext cx="163220" cy="163220"/>
+            </a:xfrm>
+            <a:prstGeom prst="ellipse">
+              <a:avLst/>
+            </a:prstGeom>
+            <a:solidFill>
+              <a:srgbClr val="1A2233"/>
+            </a:solidFill>
+            <a:ln>
+              <a:noFill/>
+            </a:ln>
+            <a:effectLst/>
+          </p:spPr>
+          <p:style>
+            <a:lnRef idx="1">
+              <a:schemeClr val="accent1"/>
+            </a:lnRef>
+            <a:fillRef idx="3">
+              <a:schemeClr val="accent1"/>
+            </a:fillRef>
+            <a:effectRef idx="2">
+              <a:schemeClr val="accent1"/>
+            </a:effectRef>
+            <a:fontRef idx="minor">
+              <a:schemeClr val="lt1"/>
+            </a:fontRef>
+          </p:style>
+          <p:txBody>
+            <a:bodyPr rtlCol="0" anchor="ctr"/>
+            <a:lstStyle/>
+            <a:p>
+              <a:pPr algn="ctr"/>
+            </a:p>
+          </p:txBody>
+        </p:sp>
+        <p:cxnSp>
+          <p:nvCxnSpPr>
+            <p:cNvPr id="19" name="Connector 18"/>
+            <p:cNvCxnSpPr/>
+            <p:nvPr/>
+          </p:nvCxnSpPr>
+          <p:spPr>
+            <a:xfrm>
+              <a:off x="2246376" y="2801112"/>
+              <a:ext cx="384048" cy="0"/>
             </a:xfrm>
             <a:prstGeom prst="line">
               <a:avLst/>
